--- a/IRC_Midterm_Visual_Refined_CN.pptx
+++ b/IRC_Midterm_Visual_Refined_CN.pptx
@@ -334,7 +334,7 @@
               <a:rPr lang="zh-CN" altLang="zh-CN" sz="1200" kern="1200" dirty="0">
                 <a:effectLst/>
               </a:rPr>
-              <a:t>Good morning, and thank you for having us. For this midterm review I'll walk through our group's progress on the IRC coursework: a lightweight IPv6 IRC server and a 命令 机器人, both built with Python sockets. Over the next few minutes I'll cover the three modules we built, the protocol parsing, our 机器人 behaviour, a membership bug we fixed, the server side, and what's left before we submit.</a:t>
+              <a:t>Good morning, and thank you for having us. For this midterm review I'll walk through our group's progress on the IRC project: a lightweight IPv6 IRC server and a 命令 机器人, both built with Python sockets. Over the next few minutes I'll cover the three modules we built, the protocol parsing, our 机器人 behaviour, a membership bug we fixed, the server side, and what's left before we submit.</a:t>
             </a:r>
           </a:p>
         </p:txBody>
